--- a/doc/comms/M2-04_WiFi6_IoT.pptx
+++ b/doc/comms/M2-04_WiFi6_IoT.pptx
@@ -2327,11 +2327,6 @@
           <a:p>
             <a:r>
               <a:t>HE — High Efficiency: o nome técnico do PHY do 802.11ax (Wi-Fi 6).</a:t>
-            </a:r>
-          </a:p>
-          <a:p>
-            <a:r>
-              <a:t>DTIM — Delivery TIM: o TIM especial que aparece a cada N beacons e anuncia tráfego broadcast/multicast. Não é outro mecanismo: é um TIM privilegiado.</a:t>
             </a:r>
           </a:p>
         </p:txBody>
@@ -19259,7 +19254,43 @@
                 </a:solidFill>
                 <a:latin typeface="Segoe UI"/>
               </a:rPr>
-              <a:t>É por isso que o lab 11 tem uma </a:t>
+              <a:t>O AP da sala (</a:t>
+            </a:r>
+            <a:r>
+              <a:rPr sz="1700" b="0">
+                <a:solidFill>
+                  <a:srgbClr val="0B1B2B"/>
+                </a:solidFill>
+                <a:latin typeface="Consolas"/>
+              </a:rPr>
+              <a:t>sidia2026_2e5</a:t>
+            </a:r>
+            <a:r>
+              <a:rPr sz="1700" b="0">
+                <a:solidFill>
+                  <a:srgbClr val="0B1B2B"/>
+                </a:solidFill>
+                <a:latin typeface="Segoe UI"/>
+              </a:rPr>
+              <a:t>, também ax, 5 GHz) respondeu </a:t>
+            </a:r>
+            <a:r>
+              <a:rPr sz="1700" b="0">
+                <a:solidFill>
+                  <a:srgbClr val="0B1B2B"/>
+                </a:solidFill>
+                <a:latin typeface="Consolas"/>
+              </a:rPr>
+              <a:t>TWT accept</a:t>
+            </a:r>
+            <a:r>
+              <a:rPr sz="1700" b="0">
+                <a:solidFill>
+                  <a:srgbClr val="0B1B2B"/>
+                </a:solidFill>
+                <a:latin typeface="Segoe UI"/>
+              </a:rPr>
+              <a:t> ao mesmo comando: é ele que atende a </a:t>
             </a:r>
             <a:r>
               <a:rPr sz="1700" b="1">
@@ -19268,7 +19299,7 @@
                 </a:solidFill>
                 <a:latin typeface="Segoe UI"/>
               </a:rPr>
-              <a:t>Parte A</a:t>
+              <a:t>Parte B</a:t>
             </a:r>
             <a:r>
               <a:rPr sz="1700" b="0">
@@ -19277,25 +19308,7 @@
                 </a:solidFill>
                 <a:latin typeface="Segoe UI"/>
               </a:rPr>
-              <a:t> que não depende de Wi-Fi 6 (DTIM e listen interval) e uma </a:t>
-            </a:r>
-            <a:r>
-              <a:rPr sz="1700" b="1">
-                <a:solidFill>
-                  <a:srgbClr val="0093D0"/>
-                </a:solidFill>
-                <a:latin typeface="Segoe UI"/>
-              </a:rPr>
-              <a:t>Parte B</a:t>
-            </a:r>
-            <a:r>
-              <a:rPr sz="1700" b="0">
-                <a:solidFill>
-                  <a:srgbClr val="0B1B2B"/>
-                </a:solidFill>
-                <a:latin typeface="Segoe UI"/>
-              </a:rPr>
-              <a:t> (TWT) pendente de um AP que negocie.</a:t>
+              <a:t> do lab 11.</a:t>
             </a:r>
           </a:p>
           <a:p>
